--- a/Notes/3_Quantum_TheoryII.pptx
+++ b/Notes/3_Quantum_TheoryII.pptx
@@ -242,7 +242,7 @@
           <a:p>
             <a:fld id="{47B5508F-B9DA-3A4B-92BF-6A4138802024}" type="datetimeFigureOut">
               <a:rPr lang="en-US" smtClean="0"/>
-              <a:t>3/21/25</a:t>
+              <a:t>9/10/26</a:t>
             </a:fld>
             <a:endParaRPr lang="en-US"/>
           </a:p>
@@ -1123,7 +1123,7 @@
             <a:fld id="{B2F2B4BC-311C-574E-AB1F-5BCC7E00BDAB}" type="datetimeFigureOut">
               <a:rPr lang="en-US" smtClean="0"/>
               <a:pPr/>
-              <a:t>3/21/25</a:t>
+              <a:t>9/10/26</a:t>
             </a:fld>
             <a:endParaRPr lang="en-US"/>
           </a:p>
@@ -1288,7 +1288,7 @@
             <a:fld id="{B2F2B4BC-311C-574E-AB1F-5BCC7E00BDAB}" type="datetimeFigureOut">
               <a:rPr lang="en-US" smtClean="0"/>
               <a:pPr/>
-              <a:t>3/21/25</a:t>
+              <a:t>9/10/26</a:t>
             </a:fld>
             <a:endParaRPr lang="en-US"/>
           </a:p>
@@ -1463,7 +1463,7 @@
             <a:fld id="{B2F2B4BC-311C-574E-AB1F-5BCC7E00BDAB}" type="datetimeFigureOut">
               <a:rPr lang="en-US" smtClean="0"/>
               <a:pPr/>
-              <a:t>3/21/25</a:t>
+              <a:t>9/10/26</a:t>
             </a:fld>
             <a:endParaRPr lang="en-US"/>
           </a:p>
@@ -1628,7 +1628,7 @@
             <a:fld id="{B2F2B4BC-311C-574E-AB1F-5BCC7E00BDAB}" type="datetimeFigureOut">
               <a:rPr lang="en-US" smtClean="0"/>
               <a:pPr/>
-              <a:t>3/21/25</a:t>
+              <a:t>9/10/26</a:t>
             </a:fld>
             <a:endParaRPr lang="en-US"/>
           </a:p>
@@ -1870,7 +1870,7 @@
             <a:fld id="{B2F2B4BC-311C-574E-AB1F-5BCC7E00BDAB}" type="datetimeFigureOut">
               <a:rPr lang="en-US" smtClean="0"/>
               <a:pPr/>
-              <a:t>3/21/25</a:t>
+              <a:t>9/10/26</a:t>
             </a:fld>
             <a:endParaRPr lang="en-US"/>
           </a:p>
@@ -2152,7 +2152,7 @@
             <a:fld id="{B2F2B4BC-311C-574E-AB1F-5BCC7E00BDAB}" type="datetimeFigureOut">
               <a:rPr lang="en-US" smtClean="0"/>
               <a:pPr/>
-              <a:t>3/21/25</a:t>
+              <a:t>9/10/26</a:t>
             </a:fld>
             <a:endParaRPr lang="en-US"/>
           </a:p>
@@ -2568,7 +2568,7 @@
             <a:fld id="{B2F2B4BC-311C-574E-AB1F-5BCC7E00BDAB}" type="datetimeFigureOut">
               <a:rPr lang="en-US" smtClean="0"/>
               <a:pPr/>
-              <a:t>3/21/25</a:t>
+              <a:t>9/10/26</a:t>
             </a:fld>
             <a:endParaRPr lang="en-US"/>
           </a:p>
@@ -2682,7 +2682,7 @@
             <a:fld id="{B2F2B4BC-311C-574E-AB1F-5BCC7E00BDAB}" type="datetimeFigureOut">
               <a:rPr lang="en-US" smtClean="0"/>
               <a:pPr/>
-              <a:t>3/21/25</a:t>
+              <a:t>9/10/26</a:t>
             </a:fld>
             <a:endParaRPr lang="en-US"/>
           </a:p>
@@ -2774,7 +2774,7 @@
             <a:fld id="{B2F2B4BC-311C-574E-AB1F-5BCC7E00BDAB}" type="datetimeFigureOut">
               <a:rPr lang="en-US" smtClean="0"/>
               <a:pPr/>
-              <a:t>3/21/25</a:t>
+              <a:t>9/10/26</a:t>
             </a:fld>
             <a:endParaRPr lang="en-US"/>
           </a:p>
@@ -3046,7 +3046,7 @@
             <a:fld id="{B2F2B4BC-311C-574E-AB1F-5BCC7E00BDAB}" type="datetimeFigureOut">
               <a:rPr lang="en-US" smtClean="0"/>
               <a:pPr/>
-              <a:t>3/21/25</a:t>
+              <a:t>9/10/26</a:t>
             </a:fld>
             <a:endParaRPr lang="en-US"/>
           </a:p>
@@ -3295,7 +3295,7 @@
             <a:fld id="{B2F2B4BC-311C-574E-AB1F-5BCC7E00BDAB}" type="datetimeFigureOut">
               <a:rPr lang="en-US" smtClean="0"/>
               <a:pPr/>
-              <a:t>3/21/25</a:t>
+              <a:t>9/10/26</a:t>
             </a:fld>
             <a:endParaRPr lang="en-US"/>
           </a:p>
@@ -3503,7 +3503,7 @@
             <a:fld id="{B2F2B4BC-311C-574E-AB1F-5BCC7E00BDAB}" type="datetimeFigureOut">
               <a:rPr lang="en-US" smtClean="0"/>
               <a:pPr/>
-              <a:t>3/21/25</a:t>
+              <a:t>9/10/26</a:t>
             </a:fld>
             <a:endParaRPr lang="en-US"/>
           </a:p>
@@ -4059,7 +4059,7 @@
                       <a:noFill/>
                       <a:extLst>
                         <a:ext uri="{909E8E84-426E-40dd-AFC4-6F175D3DCCD1}">
-                          <a14:hiddenFill xmlns:a14="http://schemas.microsoft.com/office/drawing/2010/main" xmlns="">
+                          <a14:hiddenFill xmlns="" xmlns:a14="http://schemas.microsoft.com/office/drawing/2010/main">
                             <a:blipFill dpi="0" rotWithShape="0">
                               <a:blip/>
                               <a:srcRect/>
@@ -4139,7 +4139,7 @@
                       <a:noFill/>
                       <a:extLst>
                         <a:ext uri="{909E8E84-426E-40dd-AFC4-6F175D3DCCD1}">
-                          <a14:hiddenFill xmlns:a14="http://schemas.microsoft.com/office/drawing/2010/main" xmlns="">
+                          <a14:hiddenFill xmlns="" xmlns:a14="http://schemas.microsoft.com/office/drawing/2010/main">
                             <a:blipFill dpi="0" rotWithShape="0">
                               <a:blip/>
                               <a:srcRect/>
@@ -5301,7 +5301,7 @@
                       <a:noFill/>
                       <a:extLst>
                         <a:ext uri="{909E8E84-426E-40dd-AFC4-6F175D3DCCD1}">
-                          <a14:hiddenFill xmlns:a14="http://schemas.microsoft.com/office/drawing/2010/main" xmlns="">
+                          <a14:hiddenFill xmlns="" xmlns:a14="http://schemas.microsoft.com/office/drawing/2010/main">
                             <a:blipFill dpi="0" rotWithShape="0">
                               <a:blip/>
                               <a:srcRect/>
@@ -5381,7 +5381,7 @@
                       <a:noFill/>
                       <a:extLst>
                         <a:ext uri="{909E8E84-426E-40dd-AFC4-6F175D3DCCD1}">
-                          <a14:hiddenFill xmlns:a14="http://schemas.microsoft.com/office/drawing/2010/main" xmlns="">
+                          <a14:hiddenFill xmlns="" xmlns:a14="http://schemas.microsoft.com/office/drawing/2010/main">
                             <a:blipFill dpi="0" rotWithShape="0">
                               <a:blip/>
                               <a:srcRect/>
@@ -7656,14 +7656,28 @@
                 <a:latin typeface="Times New Roman" panose="02020603050405020304" pitchFamily="18" charset="0"/>
                 <a:cs typeface="Times New Roman" panose="02020603050405020304" pitchFamily="18" charset="0"/>
               </a:rPr>
-              <a:t> which satisfy the </a:t>
+              <a:t> which satisfy </a:t>
+            </a:r>
+            <a:r>
+              <a:rPr lang="en-US" sz="2200">
+                <a:latin typeface="Times New Roman" panose="02020603050405020304" pitchFamily="18" charset="0"/>
+                <a:cs typeface="Times New Roman" panose="02020603050405020304" pitchFamily="18" charset="0"/>
+              </a:rPr>
+              <a:t>the </a:t>
+            </a:r>
+            <a:r>
+              <a:rPr lang="en-US" sz="2200" b="1">
+                <a:latin typeface="Times New Roman" panose="02020603050405020304" pitchFamily="18" charset="0"/>
+                <a:cs typeface="Times New Roman" panose="02020603050405020304" pitchFamily="18" charset="0"/>
+              </a:rPr>
+              <a:t>Fraunhofer </a:t>
             </a:r>
             <a:r>
               <a:rPr lang="en-US" sz="2200" b="1" dirty="0">
                 <a:latin typeface="Times New Roman" panose="02020603050405020304" pitchFamily="18" charset="0"/>
                 <a:cs typeface="Times New Roman" panose="02020603050405020304" pitchFamily="18" charset="0"/>
               </a:rPr>
-              <a:t>Bragg equation</a:t>
+              <a:t>equation</a:t>
             </a:r>
             <a:r>
               <a:rPr lang="en-US" sz="2200" dirty="0">
@@ -39513,7 +39527,7 @@
                       <a:noFill/>
                       <a:extLst>
                         <a:ext uri="{909E8E84-426E-40dd-AFC4-6F175D3DCCD1}">
-                          <a14:hiddenFill xmlns:a14="http://schemas.microsoft.com/office/drawing/2010/main" xmlns="">
+                          <a14:hiddenFill xmlns="" xmlns:a14="http://schemas.microsoft.com/office/drawing/2010/main">
                             <a:blipFill dpi="0" rotWithShape="0">
                               <a:blip/>
                               <a:srcRect/>
@@ -39593,7 +39607,7 @@
                       <a:noFill/>
                       <a:extLst>
                         <a:ext uri="{909E8E84-426E-40dd-AFC4-6F175D3DCCD1}">
-                          <a14:hiddenFill xmlns:a14="http://schemas.microsoft.com/office/drawing/2010/main" xmlns="">
+                          <a14:hiddenFill xmlns="" xmlns:a14="http://schemas.microsoft.com/office/drawing/2010/main">
                             <a:blipFill dpi="0" rotWithShape="0">
                               <a:blip/>
                               <a:srcRect/>
